--- a/media/resources/files/Onduktardyn_Orunduk_Maanisi_KondumC_oiznW7H.pptx
+++ b/media/resources/files/Onduktardyn_Orunduk_Maanisi_KondumC_oiznW7H.pptx
@@ -52326,7 +52326,7 @@
                 <a:ea typeface="+mn-ea"/>
                 <a:cs typeface="+mn-cs"/>
               </a:rPr>
-              <a:t>Турдуу пикирлер учун ыраазычылык билдиребиз.</a:t>
+              <a:t>Түрдүү пикирлер үчүн ыраазычылык билдиребиз.</a:t>
             </a:r>
           </a:p>
           <a:p>

--- a/media/resources/files/Onduktardyn_Orunduk_Maanisi_KondumC_oiznW7H.pptx
+++ b/media/resources/files/Onduktardyn_Orunduk_Maanisi_KondumC_oiznW7H.pptx
@@ -26366,7 +26366,7 @@
             <a:pPr algn="ctr"/>
             <a:r>
               <a:rPr lang="en-GB" sz="2400" dirty="0"/>
-              <a:t>0.4</a:t>
+              <a:t>0,4</a:t>
             </a:r>
           </a:p>
         </p:txBody>
@@ -26409,7 +26409,7 @@
             <a:pPr algn="ctr"/>
             <a:r>
               <a:rPr lang="en-GB" sz="2400" dirty="0"/>
-              <a:t>1.1</a:t>
+              <a:t>1,1</a:t>
             </a:r>
           </a:p>
         </p:txBody>
@@ -26452,7 +26452,7 @@
             <a:pPr algn="ctr"/>
             <a:r>
               <a:rPr lang="en-GB" sz="2400" dirty="0"/>
-              <a:t>1.04</a:t>
+              <a:t>1,04</a:t>
             </a:r>
           </a:p>
         </p:txBody>
@@ -26495,7 +26495,7 @@
             <a:pPr algn="ctr"/>
             <a:r>
               <a:rPr lang="en-GB" sz="2400" dirty="0"/>
-              <a:t>2.3</a:t>
+              <a:t>2,3</a:t>
             </a:r>
           </a:p>
         </p:txBody>
@@ -26538,7 +26538,7 @@
             <a:pPr algn="ctr"/>
             <a:r>
               <a:rPr lang="en-GB" sz="2400" dirty="0"/>
-              <a:t>0.26</a:t>
+              <a:t>0,26</a:t>
             </a:r>
           </a:p>
         </p:txBody>
@@ -26581,7 +26581,7 @@
             <a:pPr algn="ctr"/>
             <a:r>
               <a:rPr lang="en-GB" sz="2400" dirty="0"/>
-              <a:t>1.54</a:t>
+              <a:t>1,54</a:t>
             </a:r>
           </a:p>
         </p:txBody>
@@ -38966,7 +38966,7 @@
             <a:pPr algn="ctr"/>
             <a:r>
               <a:rPr lang="en-GB" sz="2400" dirty="0"/>
-              <a:t>0.4</a:t>
+              <a:t>0,4</a:t>
             </a:r>
           </a:p>
         </p:txBody>
@@ -39009,7 +39009,7 @@
             <a:pPr algn="ctr"/>
             <a:r>
               <a:rPr lang="en-GB" sz="2400" dirty="0"/>
-              <a:t>1.1</a:t>
+              <a:t>1,1</a:t>
             </a:r>
           </a:p>
         </p:txBody>
@@ -39052,7 +39052,7 @@
             <a:pPr algn="ctr"/>
             <a:r>
               <a:rPr lang="en-GB" sz="2400" dirty="0"/>
-              <a:t>1.04</a:t>
+              <a:t>1,04</a:t>
             </a:r>
           </a:p>
         </p:txBody>
@@ -39095,7 +39095,7 @@
             <a:pPr algn="ctr"/>
             <a:r>
               <a:rPr lang="en-GB" sz="2400" dirty="0"/>
-              <a:t>2.3</a:t>
+              <a:t>2,3</a:t>
             </a:r>
           </a:p>
         </p:txBody>
@@ -39138,7 +39138,7 @@
             <a:pPr algn="ctr"/>
             <a:r>
               <a:rPr lang="en-GB" sz="2400" dirty="0"/>
-              <a:t>0.26</a:t>
+              <a:t>0,26</a:t>
             </a:r>
           </a:p>
         </p:txBody>
@@ -39181,7 +39181,7 @@
             <a:pPr algn="ctr"/>
             <a:r>
               <a:rPr lang="en-GB" sz="2400" dirty="0"/>
-              <a:t>1.54</a:t>
+              <a:t>1,54</a:t>
             </a:r>
           </a:p>
         </p:txBody>
@@ -39224,7 +39224,7 @@
             <a:pPr algn="ctr"/>
             <a:r>
               <a:rPr lang="en-GB" sz="2400" dirty="0"/>
-              <a:t>0.87</a:t>
+              <a:t>0,87</a:t>
             </a:r>
           </a:p>
         </p:txBody>
@@ -39267,7 +39267,7 @@
             <a:pPr algn="ctr"/>
             <a:r>
               <a:rPr lang="en-GB" sz="2400" dirty="0"/>
-              <a:t>3.32</a:t>
+              <a:t>3,32</a:t>
             </a:r>
           </a:p>
         </p:txBody>
@@ -39310,7 +39310,7 @@
             <a:pPr algn="ctr"/>
             <a:r>
               <a:rPr lang="en-GB" sz="2400" dirty="0"/>
-              <a:t>2.1</a:t>
+              <a:t>2,1</a:t>
             </a:r>
           </a:p>
         </p:txBody>
@@ -39353,7 +39353,7 @@
             <a:pPr algn="ctr"/>
             <a:r>
               <a:rPr lang="en-GB" sz="2400" dirty="0"/>
-              <a:t>3.51</a:t>
+              <a:t>3,51</a:t>
             </a:r>
           </a:p>
         </p:txBody>
@@ -39396,7 +39396,7 @@
             <a:pPr algn="ctr"/>
             <a:r>
               <a:rPr lang="en-GB" sz="2400"/>
-              <a:t>1.45</a:t>
+              <a:t>1,45</a:t>
             </a:r>
             <a:endParaRPr lang="en-GB" sz="2400" dirty="0"/>
           </a:p>
@@ -39440,7 +39440,7 @@
             <a:pPr algn="ctr"/>
             <a:r>
               <a:rPr lang="en-GB" sz="2400" dirty="0"/>
-              <a:t>2.12</a:t>
+              <a:t>2,12</a:t>
             </a:r>
           </a:p>
         </p:txBody>
